--- a/public/fun/pack/pptx/birthday/돌잔치_32_돌잡이중심_도서관창가.pptx
+++ b/public/fun/pack/pptx/birthday/돌잔치_32_돌잡이중심_도서관창가.pptx
@@ -3286,6 +3286,14 @@
 <file path=ppt/slides/slide1.xml><?xml version="1.0" encoding="utf-8"?>
 <p:sld xmlns:a="http://schemas.openxmlformats.org/drawingml/2006/main" xmlns:p="http://schemas.openxmlformats.org/presentationml/2006/main" xmlns:r="http://schemas.openxmlformats.org/officeDocument/2006/relationships">
   <p:cSld>
+    <p:bg>
+      <p:bgPr>
+        <a:solidFill>
+          <a:srgbClr val="FBF2EC"/>
+        </a:solidFill>
+        <a:effectLst/>
+      </p:bgPr>
+    </p:bg>
     <p:spTree>
       <p:nvGrpSpPr>
         <p:cNvPr id="1" name=""/>
@@ -3293,30 +3301,119 @@
         <p:nvPr/>
       </p:nvGrpSpPr>
       <p:grpSpPr/>
-      <p:pic>
-        <p:nvPicPr>
-          <p:cNvPr id="3" name="표지 그림" descr="birthday-32.jpg"/>
-          <p:cNvPicPr>
-            <a:picLocks noChangeAspect="1"/>
-          </p:cNvPicPr>
+      <p:sp>
+        <p:nvSpPr>
+          <p:cNvPr id="3" name="사진 자리"/>
+          <p:cNvSpPr/>
           <p:nvPr/>
-        </p:nvPicPr>
-        <p:blipFill>
-          <a:blip r:embed="rId2"/>
-          <a:stretch>
-            <a:fillRect/>
-          </a:stretch>
-        </p:blipFill>
-        <p:spPr>
-          <a:xfrm>
-            <a:off x="0" y="0"/>
-            <a:ext cx="12191695" cy="6858000"/>
+        </p:nvSpPr>
+        <p:spPr>
+          <a:xfrm>
+            <a:off x="7558851" y="685800"/>
+            <a:ext cx="3169840" cy="5486400"/>
+          </a:xfrm>
+          <a:prstGeom prst="round2SameRect">
+            <a:avLst>
+              <a:gd name="adj1" fmla="val 50000"/>
+              <a:gd name="adj2" fmla="val 0"/>
+            </a:avLst>
+          </a:prstGeom>
+          <a:solidFill>
+            <a:srgbClr val="EBC6AD"/>
+          </a:solidFill>
+          <a:ln>
+            <a:noFill/>
+          </a:ln>
+        </p:spPr>
+        <p:txBody>
+          <a:bodyPr rtlCol="0" anchor="ctr" wrap="square" lIns="54864" rIns="54864" tIns="27432" bIns="27432">
+            <a:noAutofit/>
+          </a:bodyPr>
+          <a:lstStyle/>
+          <a:p>
+            <a:pPr algn="ctr">
+              <a:lnSpc>
+                <a:spcPct val="100000"/>
+              </a:lnSpc>
+            </a:pPr>
+            <a:r>
+              <a:rPr sz="1400" b="0" i="0">
+                <a:solidFill>
+                  <a:srgbClr val="493527"/>
+                </a:solidFill>
+              </a:rPr>
+              <a:t>사진을 넣어 주세요</a:t>
+            </a:r>
+          </a:p>
+        </p:txBody>
+      </p:sp>
+      <p:sp>
+        <p:nvSpPr>
+          <p:cNvPr id="4" name="장식"/>
+          <p:cNvSpPr/>
+          <p:nvPr/>
+        </p:nvSpPr>
+        <p:spPr>
+          <a:xfrm>
+            <a:off x="6827349" y="4251960"/>
+            <a:ext cx="1005840" cy="1005840"/>
+          </a:xfrm>
+          <a:prstGeom prst="ellipse">
+            <a:avLst/>
+          </a:prstGeom>
+          <a:solidFill>
+            <a:srgbClr val="EBC6AD"/>
+          </a:solidFill>
+          <a:ln>
+            <a:noFill/>
+          </a:ln>
+        </p:spPr>
+        <p:txBody>
+          <a:bodyPr rtlCol="0" anchor="ctr"/>
+          <a:lstStyle/>
+          <a:p>
+            <a:pPr algn="ctr"/>
+          </a:p>
+        </p:txBody>
+      </p:sp>
+      <p:sp>
+        <p:nvSpPr>
+          <p:cNvPr id="5" name="라벨"/>
+          <p:cNvSpPr txBox="1"/>
+          <p:nvPr/>
+        </p:nvSpPr>
+        <p:spPr>
+          <a:xfrm>
+            <a:off x="822960" y="2148840"/>
+            <a:ext cx="5608179" cy="274320"/>
           </a:xfrm>
           <a:prstGeom prst="rect">
             <a:avLst/>
           </a:prstGeom>
-        </p:spPr>
-      </p:pic>
+          <a:noFill/>
+        </p:spPr>
+        <p:txBody>
+          <a:bodyPr wrap="square" lIns="54864" rIns="54864" tIns="27432" bIns="27432" anchor="t">
+            <a:noAutofit/>
+          </a:bodyPr>
+          <a:lstStyle/>
+          <a:p>
+            <a:pPr algn="l">
+              <a:lnSpc>
+                <a:spcPct val="115000"/>
+              </a:lnSpc>
+            </a:pPr>
+            <a:r>
+              <a:rPr sz="1000" b="1" i="0" spc="250">
+                <a:solidFill>
+                  <a:srgbClr val="26231F"/>
+                </a:solidFill>
+              </a:rPr>
+              <a:t>FIRST BIRTHDAY</a:t>
+            </a:r>
+          </a:p>
+        </p:txBody>
+      </p:sp>
       <p:sp>
         <p:nvSpPr>
           <p:cNvPr id="2" name="Title 1"/>
@@ -3329,8 +3426,8 @@
         </p:nvSpPr>
         <p:spPr>
           <a:xfrm>
-            <a:off x="853418" y="2057400"/>
-            <a:ext cx="6095847" cy="1554480"/>
+            <a:off x="822960" y="2606040"/>
+            <a:ext cx="5608179" cy="1188720"/>
           </a:xfrm>
         </p:spPr>
         <p:txBody>
@@ -3347,7 +3444,7 @@
             <a:r>
               <a:rPr sz="4000" b="1" i="0">
                 <a:solidFill>
-                  <a:srgbClr val="37261A"/>
+                  <a:srgbClr val="26231F"/>
                 </a:solidFill>
               </a:rPr>
               <a:t>첫 번째 생일</a:t>
@@ -3357,14 +3454,14 @@
       </p:sp>
       <p:sp>
         <p:nvSpPr>
-          <p:cNvPr id="4" name="한 줄 문구"/>
+          <p:cNvPr id="6" name="한 줄 문구"/>
           <p:cNvSpPr txBox="1"/>
           <p:nvPr/>
         </p:nvSpPr>
         <p:spPr>
           <a:xfrm>
-            <a:off x="853418" y="3749039"/>
-            <a:ext cx="6095847" cy="822960"/>
+            <a:off x="822960" y="3886200"/>
+            <a:ext cx="5608179" cy="822960"/>
           </a:xfrm>
           <a:prstGeom prst="rect">
             <a:avLst/>
@@ -3383,9 +3480,9 @@
               </a:lnSpc>
             </a:pPr>
             <a:r>
-              <a:rPr sz="1700" b="0" i="1">
+              <a:rPr sz="1700" b="0" i="0">
                 <a:solidFill>
-                  <a:srgbClr val="37261A"/>
+                  <a:srgbClr val="26231F"/>
                 </a:solidFill>
               </a:rPr>
               <a:t>누가 먼저 손을 내밀었는지 기록합니다</a:t>
@@ -3395,14 +3492,14 @@
       </p:sp>
       <p:sp>
         <p:nvSpPr>
-          <p:cNvPr id="5" name="안내 문구"/>
+          <p:cNvPr id="7" name="안내 문구"/>
           <p:cNvSpPr txBox="1"/>
           <p:nvPr/>
         </p:nvSpPr>
         <p:spPr>
           <a:xfrm>
-            <a:off x="853418" y="4617720"/>
-            <a:ext cx="6095847" cy="914400"/>
+            <a:off x="822960" y="4754880"/>
+            <a:ext cx="5608179" cy="914400"/>
           </a:xfrm>
           <a:prstGeom prst="rect">
             <a:avLst/>
@@ -3423,10 +3520,10 @@
             <a:r>
               <a:rPr sz="1400" b="0" i="0">
                 <a:solidFill>
-                  <a:srgbClr val="666666"/>
+                  <a:srgbClr val="26231F"/>
                 </a:solidFill>
               </a:rPr>
-              <a:t>아기 이름 · 2027. 00. 00</a:t>
+              <a:t>아기 이름 · 날짜 입력</a:t>
             </a:r>
           </a:p>
           <a:p>
@@ -3438,7 +3535,7 @@
             <a:r>
               <a:rPr sz="1400" b="0" i="0">
                 <a:solidFill>
-                  <a:srgbClr val="666666"/>
+                  <a:srgbClr val="26231F"/>
                 </a:solidFill>
               </a:rPr>
               <a:t>장소를 입력하세요</a:t>
@@ -3460,7 +3557,7 @@
     <p:bg>
       <p:bgPr>
         <a:solidFill>
-          <a:srgbClr val="FFFFFF"/>
+          <a:srgbClr val="FBF2EC"/>
         </a:solidFill>
         <a:effectLst/>
       </p:bgPr>
@@ -3480,14 +3577,14 @@
         </p:nvSpPr>
         <p:spPr>
           <a:xfrm>
-            <a:off x="0" y="384048"/>
-            <a:ext cx="9509522" cy="896112"/>
-          </a:xfrm>
-          <a:prstGeom prst="homePlate">
+            <a:off x="640080" y="566928"/>
+            <a:ext cx="10911535" cy="10972"/>
+          </a:xfrm>
+          <a:prstGeom prst="rect">
             <a:avLst/>
           </a:prstGeom>
           <a:solidFill>
-            <a:srgbClr val="765037"/>
+            <a:srgbClr val="26231F"/>
           </a:solidFill>
           <a:ln>
             <a:noFill/>
@@ -3503,6 +3600,73 @@
       </p:sp>
       <p:sp>
         <p:nvSpPr>
+          <p:cNvPr id="4" name="상단 라벨"/>
+          <p:cNvSpPr txBox="1"/>
+          <p:nvPr/>
+        </p:nvSpPr>
+        <p:spPr>
+          <a:xfrm>
+            <a:off x="640080" y="237744"/>
+            <a:ext cx="5486400" cy="274320"/>
+          </a:xfrm>
+          <a:prstGeom prst="rect">
+            <a:avLst/>
+          </a:prstGeom>
+          <a:noFill/>
+        </p:spPr>
+        <p:txBody>
+          <a:bodyPr wrap="square" lIns="54864" rIns="54864" tIns="27432" bIns="27432" anchor="ctr">
+            <a:noAutofit/>
+          </a:bodyPr>
+          <a:lstStyle/>
+          <a:p>
+            <a:pPr algn="l">
+              <a:lnSpc>
+                <a:spcPct val="115000"/>
+              </a:lnSpc>
+            </a:pPr>
+            <a:r>
+              <a:rPr sz="900" b="1" i="0" spc="250">
+                <a:solidFill>
+                  <a:srgbClr val="26231F"/>
+                </a:solidFill>
+              </a:rPr>
+              <a:t>FIRST BIRTHDAY</a:t>
+            </a:r>
+          </a:p>
+        </p:txBody>
+      </p:sp>
+      <p:sp>
+        <p:nvSpPr>
+          <p:cNvPr id="5" name="포인트"/>
+          <p:cNvSpPr/>
+          <p:nvPr/>
+        </p:nvSpPr>
+        <p:spPr>
+          <a:xfrm>
+            <a:off x="11204143" y="246888"/>
+            <a:ext cx="237744" cy="237744"/>
+          </a:xfrm>
+          <a:prstGeom prst="donut">
+            <a:avLst/>
+          </a:prstGeom>
+          <a:solidFill>
+            <a:srgbClr val="D89F79"/>
+          </a:solidFill>
+          <a:ln>
+            <a:noFill/>
+          </a:ln>
+        </p:spPr>
+        <p:txBody>
+          <a:bodyPr rtlCol="0" anchor="ctr"/>
+          <a:lstStyle/>
+          <a:p>
+            <a:pPr algn="ctr"/>
+          </a:p>
+        </p:txBody>
+      </p:sp>
+      <p:sp>
+        <p:nvSpPr>
           <p:cNvPr id="2" name="Title 1"/>
           <p:cNvSpPr>
             <a:spLocks noGrp="1"/>
@@ -3513,8 +3677,8 @@
         </p:nvSpPr>
         <p:spPr>
           <a:xfrm>
-            <a:off x="640080" y="411480"/>
-            <a:ext cx="8412242" cy="822960"/>
+            <a:off x="640080" y="731520"/>
+            <a:ext cx="10911535" cy="822960"/>
           </a:xfrm>
         </p:spPr>
         <p:txBody>
@@ -3531,7 +3695,7 @@
             <a:r>
               <a:rPr sz="3000" b="1" i="0">
                 <a:solidFill>
-                  <a:srgbClr val="FFFFFF"/>
+                  <a:srgbClr val="26231F"/>
                 </a:solidFill>
               </a:rPr>
               <a:t>우리 아기를 소개합니다</a:t>
@@ -3541,14 +3705,14 @@
       </p:sp>
       <p:sp>
         <p:nvSpPr>
-          <p:cNvPr id="4" name="사진 자리"/>
+          <p:cNvPr id="6" name="사진 자리"/>
           <p:cNvSpPr/>
           <p:nvPr/>
         </p:nvSpPr>
         <p:spPr>
           <a:xfrm>
-            <a:off x="640080" y="1645920"/>
-            <a:ext cx="3840480" cy="4572000"/>
+            <a:off x="640080" y="1783080"/>
+            <a:ext cx="3840480" cy="4389120"/>
           </a:xfrm>
           <a:prstGeom prst="roundRect">
             <a:avLst>
@@ -3556,12 +3720,10 @@
             </a:avLst>
           </a:prstGeom>
           <a:solidFill>
-            <a:srgbClr val="EDDED4"/>
+            <a:srgbClr val="F6E2D5"/>
           </a:solidFill>
           <a:ln w="19050">
-            <a:solidFill>
-              <a:srgbClr val="765037"/>
-            </a:solidFill>
+            <a:noFill/>
             <a:prstDash val="dash"/>
           </a:ln>
         </p:spPr>
@@ -3579,7 +3741,7 @@
             <a:r>
               <a:rPr sz="1400" b="0" i="0">
                 <a:solidFill>
-                  <a:srgbClr val="37261A"/>
+                  <a:srgbClr val="8E8780"/>
                 </a:solidFill>
               </a:rPr>
               <a:t>아기 사진을 넣어 주세요</a:t>
@@ -3589,14 +3751,14 @@
       </p:sp>
       <p:graphicFrame>
         <p:nvGraphicFramePr>
-          <p:cNvPr id="5" name="표"/>
+          <p:cNvPr id="7" name="표"/>
           <p:cNvGraphicFramePr>
             <a:graphicFrameLocks noGrp="1"/>
           </p:cNvGraphicFramePr>
           <p:nvPr/>
         </p:nvGraphicFramePr>
         <p:xfrm>
-          <a:off x="4846320" y="1645920"/>
+          <a:off x="4846320" y="1783080"/>
           <a:ext cx="6705295" cy="3950208"/>
         </p:xfrm>
         <a:graphic>
@@ -3619,7 +3781,7 @@
                       <a:r>
                         <a:rPr sz="1500" b="1">
                           <a:solidFill>
-                            <a:srgbClr val="37261A"/>
+                            <a:srgbClr val="493527"/>
                           </a:solidFill>
                         </a:rPr>
                         <a:t>이름</a:t>
@@ -3629,30 +3791,30 @@
                   <a:tcPr anchor="ctr" marL="73152" marR="73152">
                     <a:lnL w="9525" cap="flat" cmpd="sng" algn="ctr">
                       <a:solidFill>
-                        <a:srgbClr val="EDDED4"/>
+                        <a:srgbClr val="F6E2D5"/>
                       </a:solidFill>
                       <a:prstDash val="solid"/>
                     </a:lnL>
                     <a:lnR w="9525" cap="flat" cmpd="sng" algn="ctr">
                       <a:solidFill>
-                        <a:srgbClr val="EDDED4"/>
+                        <a:srgbClr val="F6E2D5"/>
                       </a:solidFill>
                       <a:prstDash val="solid"/>
                     </a:lnR>
                     <a:lnT w="9525" cap="flat" cmpd="sng" algn="ctr">
                       <a:solidFill>
-                        <a:srgbClr val="EDDED4"/>
+                        <a:srgbClr val="F6E2D5"/>
                       </a:solidFill>
                       <a:prstDash val="solid"/>
                     </a:lnT>
                     <a:lnB w="9525" cap="flat" cmpd="sng" algn="ctr">
                       <a:solidFill>
-                        <a:srgbClr val="EDDED4"/>
+                        <a:srgbClr val="F6E2D5"/>
                       </a:solidFill>
                       <a:prstDash val="solid"/>
                     </a:lnB>
                     <a:solidFill>
-                      <a:srgbClr val="EDDED4"/>
+                      <a:srgbClr val="F6E2D5"/>
                     </a:solidFill>
                   </a:tcPr>
                 </a:tc>
@@ -3665,7 +3827,7 @@
                       <a:r>
                         <a:rPr sz="1500" b="0">
                           <a:solidFill>
-                            <a:srgbClr val="2B2B2B"/>
+                            <a:srgbClr val="26231F"/>
                           </a:solidFill>
                         </a:rPr>
                         <a:t>입력하세요</a:t>
@@ -3675,30 +3837,30 @@
                   <a:tcPr anchor="ctr" marL="73152" marR="73152">
                     <a:lnL w="9525" cap="flat" cmpd="sng" algn="ctr">
                       <a:solidFill>
-                        <a:srgbClr val="EDDED4"/>
+                        <a:srgbClr val="F6E2D5"/>
                       </a:solidFill>
                       <a:prstDash val="solid"/>
                     </a:lnL>
                     <a:lnR w="9525" cap="flat" cmpd="sng" algn="ctr">
                       <a:solidFill>
-                        <a:srgbClr val="EDDED4"/>
+                        <a:srgbClr val="F6E2D5"/>
                       </a:solidFill>
                       <a:prstDash val="solid"/>
                     </a:lnR>
                     <a:lnT w="9525" cap="flat" cmpd="sng" algn="ctr">
                       <a:solidFill>
-                        <a:srgbClr val="EDDED4"/>
+                        <a:srgbClr val="F6E2D5"/>
                       </a:solidFill>
                       <a:prstDash val="solid"/>
                     </a:lnT>
                     <a:lnB w="9525" cap="flat" cmpd="sng" algn="ctr">
                       <a:solidFill>
-                        <a:srgbClr val="EDDED4"/>
+                        <a:srgbClr val="F6E2D5"/>
                       </a:solidFill>
                       <a:prstDash val="solid"/>
                     </a:lnB>
                     <a:solidFill>
-                      <a:srgbClr val="F8F4F1"/>
+                      <a:srgbClr val="FBF2EC"/>
                     </a:solidFill>
                   </a:tcPr>
                 </a:tc>
@@ -3713,7 +3875,7 @@
                       <a:r>
                         <a:rPr sz="1500" b="1">
                           <a:solidFill>
-                            <a:srgbClr val="37261A"/>
+                            <a:srgbClr val="493527"/>
                           </a:solidFill>
                         </a:rPr>
                         <a:t>생일</a:t>
@@ -3723,30 +3885,30 @@
                   <a:tcPr anchor="ctr" marL="73152" marR="73152">
                     <a:lnL w="9525" cap="flat" cmpd="sng" algn="ctr">
                       <a:solidFill>
-                        <a:srgbClr val="EDDED4"/>
+                        <a:srgbClr val="F6E2D5"/>
                       </a:solidFill>
                       <a:prstDash val="solid"/>
                     </a:lnL>
                     <a:lnR w="9525" cap="flat" cmpd="sng" algn="ctr">
                       <a:solidFill>
-                        <a:srgbClr val="EDDED4"/>
+                        <a:srgbClr val="F6E2D5"/>
                       </a:solidFill>
                       <a:prstDash val="solid"/>
                     </a:lnR>
                     <a:lnT w="9525" cap="flat" cmpd="sng" algn="ctr">
                       <a:solidFill>
-                        <a:srgbClr val="EDDED4"/>
+                        <a:srgbClr val="F6E2D5"/>
                       </a:solidFill>
                       <a:prstDash val="solid"/>
                     </a:lnT>
                     <a:lnB w="9525" cap="flat" cmpd="sng" algn="ctr">
                       <a:solidFill>
-                        <a:srgbClr val="EDDED4"/>
+                        <a:srgbClr val="F6E2D5"/>
                       </a:solidFill>
                       <a:prstDash val="solid"/>
                     </a:lnB>
                     <a:solidFill>
-                      <a:srgbClr val="EDDED4"/>
+                      <a:srgbClr val="F6E2D5"/>
                     </a:solidFill>
                   </a:tcPr>
                 </a:tc>
@@ -3759,7 +3921,7 @@
                       <a:r>
                         <a:rPr sz="1500" b="0">
                           <a:solidFill>
-                            <a:srgbClr val="2B2B2B"/>
+                            <a:srgbClr val="26231F"/>
                           </a:solidFill>
                         </a:rPr>
                         <a:t>입력하세요</a:t>
@@ -3769,25 +3931,25 @@
                   <a:tcPr anchor="ctr" marL="73152" marR="73152">
                     <a:lnL w="9525" cap="flat" cmpd="sng" algn="ctr">
                       <a:solidFill>
-                        <a:srgbClr val="EDDED4"/>
+                        <a:srgbClr val="F6E2D5"/>
                       </a:solidFill>
                       <a:prstDash val="solid"/>
                     </a:lnL>
                     <a:lnR w="9525" cap="flat" cmpd="sng" algn="ctr">
                       <a:solidFill>
-                        <a:srgbClr val="EDDED4"/>
+                        <a:srgbClr val="F6E2D5"/>
                       </a:solidFill>
                       <a:prstDash val="solid"/>
                     </a:lnR>
                     <a:lnT w="9525" cap="flat" cmpd="sng" algn="ctr">
                       <a:solidFill>
-                        <a:srgbClr val="EDDED4"/>
+                        <a:srgbClr val="F6E2D5"/>
                       </a:solidFill>
                       <a:prstDash val="solid"/>
                     </a:lnT>
                     <a:lnB w="9525" cap="flat" cmpd="sng" algn="ctr">
                       <a:solidFill>
-                        <a:srgbClr val="EDDED4"/>
+                        <a:srgbClr val="F6E2D5"/>
                       </a:solidFill>
                       <a:prstDash val="solid"/>
                     </a:lnB>
@@ -3807,7 +3969,7 @@
                       <a:r>
                         <a:rPr sz="1500" b="1">
                           <a:solidFill>
-                            <a:srgbClr val="37261A"/>
+                            <a:srgbClr val="493527"/>
                           </a:solidFill>
                         </a:rPr>
                         <a:t>키 · 몸무게</a:t>
@@ -3817,30 +3979,30 @@
                   <a:tcPr anchor="ctr" marL="73152" marR="73152">
                     <a:lnL w="9525" cap="flat" cmpd="sng" algn="ctr">
                       <a:solidFill>
-                        <a:srgbClr val="EDDED4"/>
+                        <a:srgbClr val="F6E2D5"/>
                       </a:solidFill>
                       <a:prstDash val="solid"/>
                     </a:lnL>
                     <a:lnR w="9525" cap="flat" cmpd="sng" algn="ctr">
                       <a:solidFill>
-                        <a:srgbClr val="EDDED4"/>
+                        <a:srgbClr val="F6E2D5"/>
                       </a:solidFill>
                       <a:prstDash val="solid"/>
                     </a:lnR>
                     <a:lnT w="9525" cap="flat" cmpd="sng" algn="ctr">
                       <a:solidFill>
-                        <a:srgbClr val="EDDED4"/>
+                        <a:srgbClr val="F6E2D5"/>
                       </a:solidFill>
                       <a:prstDash val="solid"/>
                     </a:lnT>
                     <a:lnB w="9525" cap="flat" cmpd="sng" algn="ctr">
                       <a:solidFill>
-                        <a:srgbClr val="EDDED4"/>
+                        <a:srgbClr val="F6E2D5"/>
                       </a:solidFill>
                       <a:prstDash val="solid"/>
                     </a:lnB>
                     <a:solidFill>
-                      <a:srgbClr val="EDDED4"/>
+                      <a:srgbClr val="F6E2D5"/>
                     </a:solidFill>
                   </a:tcPr>
                 </a:tc>
@@ -3853,7 +4015,7 @@
                       <a:r>
                         <a:rPr sz="1500" b="0">
                           <a:solidFill>
-                            <a:srgbClr val="2B2B2B"/>
+                            <a:srgbClr val="26231F"/>
                           </a:solidFill>
                         </a:rPr>
                         <a:t>입력하세요</a:t>
@@ -3863,30 +4025,30 @@
                   <a:tcPr anchor="ctr" marL="73152" marR="73152">
                     <a:lnL w="9525" cap="flat" cmpd="sng" algn="ctr">
                       <a:solidFill>
-                        <a:srgbClr val="EDDED4"/>
+                        <a:srgbClr val="F6E2D5"/>
                       </a:solidFill>
                       <a:prstDash val="solid"/>
                     </a:lnL>
                     <a:lnR w="9525" cap="flat" cmpd="sng" algn="ctr">
                       <a:solidFill>
-                        <a:srgbClr val="EDDED4"/>
+                        <a:srgbClr val="F6E2D5"/>
                       </a:solidFill>
                       <a:prstDash val="solid"/>
                     </a:lnR>
                     <a:lnT w="9525" cap="flat" cmpd="sng" algn="ctr">
                       <a:solidFill>
-                        <a:srgbClr val="EDDED4"/>
+                        <a:srgbClr val="F6E2D5"/>
                       </a:solidFill>
                       <a:prstDash val="solid"/>
                     </a:lnT>
                     <a:lnB w="9525" cap="flat" cmpd="sng" algn="ctr">
                       <a:solidFill>
-                        <a:srgbClr val="EDDED4"/>
+                        <a:srgbClr val="F6E2D5"/>
                       </a:solidFill>
                       <a:prstDash val="solid"/>
                     </a:lnB>
                     <a:solidFill>
-                      <a:srgbClr val="F8F4F1"/>
+                      <a:srgbClr val="FBF2EC"/>
                     </a:solidFill>
                   </a:tcPr>
                 </a:tc>
@@ -3901,7 +4063,7 @@
                       <a:r>
                         <a:rPr sz="1500" b="1">
                           <a:solidFill>
-                            <a:srgbClr val="37261A"/>
+                            <a:srgbClr val="493527"/>
                           </a:solidFill>
                         </a:rPr>
                         <a:t>좋아하는 것</a:t>
@@ -3911,30 +4073,30 @@
                   <a:tcPr anchor="ctr" marL="73152" marR="73152">
                     <a:lnL w="9525" cap="flat" cmpd="sng" algn="ctr">
                       <a:solidFill>
-                        <a:srgbClr val="EDDED4"/>
+                        <a:srgbClr val="F6E2D5"/>
                       </a:solidFill>
                       <a:prstDash val="solid"/>
                     </a:lnL>
                     <a:lnR w="9525" cap="flat" cmpd="sng" algn="ctr">
                       <a:solidFill>
-                        <a:srgbClr val="EDDED4"/>
+                        <a:srgbClr val="F6E2D5"/>
                       </a:solidFill>
                       <a:prstDash val="solid"/>
                     </a:lnR>
                     <a:lnT w="9525" cap="flat" cmpd="sng" algn="ctr">
                       <a:solidFill>
-                        <a:srgbClr val="EDDED4"/>
+                        <a:srgbClr val="F6E2D5"/>
                       </a:solidFill>
                       <a:prstDash val="solid"/>
                     </a:lnT>
                     <a:lnB w="9525" cap="flat" cmpd="sng" algn="ctr">
                       <a:solidFill>
-                        <a:srgbClr val="EDDED4"/>
+                        <a:srgbClr val="F6E2D5"/>
                       </a:solidFill>
                       <a:prstDash val="solid"/>
                     </a:lnB>
                     <a:solidFill>
-                      <a:srgbClr val="EDDED4"/>
+                      <a:srgbClr val="F6E2D5"/>
                     </a:solidFill>
                   </a:tcPr>
                 </a:tc>
@@ -3947,7 +4109,7 @@
                       <a:r>
                         <a:rPr sz="1500" b="0">
                           <a:solidFill>
-                            <a:srgbClr val="2B2B2B"/>
+                            <a:srgbClr val="26231F"/>
                           </a:solidFill>
                         </a:rPr>
                         <a:t>입력하세요</a:t>
@@ -3957,25 +4119,25 @@
                   <a:tcPr anchor="ctr" marL="73152" marR="73152">
                     <a:lnL w="9525" cap="flat" cmpd="sng" algn="ctr">
                       <a:solidFill>
-                        <a:srgbClr val="EDDED4"/>
+                        <a:srgbClr val="F6E2D5"/>
                       </a:solidFill>
                       <a:prstDash val="solid"/>
                     </a:lnL>
                     <a:lnR w="9525" cap="flat" cmpd="sng" algn="ctr">
                       <a:solidFill>
-                        <a:srgbClr val="EDDED4"/>
+                        <a:srgbClr val="F6E2D5"/>
                       </a:solidFill>
                       <a:prstDash val="solid"/>
                     </a:lnR>
                     <a:lnT w="9525" cap="flat" cmpd="sng" algn="ctr">
                       <a:solidFill>
-                        <a:srgbClr val="EDDED4"/>
+                        <a:srgbClr val="F6E2D5"/>
                       </a:solidFill>
                       <a:prstDash val="solid"/>
                     </a:lnT>
                     <a:lnB w="9525" cap="flat" cmpd="sng" algn="ctr">
                       <a:solidFill>
-                        <a:srgbClr val="EDDED4"/>
+                        <a:srgbClr val="F6E2D5"/>
                       </a:solidFill>
                       <a:prstDash val="solid"/>
                     </a:lnB>
@@ -3995,7 +4157,7 @@
                       <a:r>
                         <a:rPr sz="1500" b="1">
                           <a:solidFill>
-                            <a:srgbClr val="37261A"/>
+                            <a:srgbClr val="493527"/>
                           </a:solidFill>
                         </a:rPr>
                         <a:t>별명</a:t>
@@ -4005,30 +4167,30 @@
                   <a:tcPr anchor="ctr" marL="73152" marR="73152">
                     <a:lnL w="9525" cap="flat" cmpd="sng" algn="ctr">
                       <a:solidFill>
-                        <a:srgbClr val="EDDED4"/>
+                        <a:srgbClr val="F6E2D5"/>
                       </a:solidFill>
                       <a:prstDash val="solid"/>
                     </a:lnL>
                     <a:lnR w="9525" cap="flat" cmpd="sng" algn="ctr">
                       <a:solidFill>
-                        <a:srgbClr val="EDDED4"/>
+                        <a:srgbClr val="F6E2D5"/>
                       </a:solidFill>
                       <a:prstDash val="solid"/>
                     </a:lnR>
                     <a:lnT w="9525" cap="flat" cmpd="sng" algn="ctr">
                       <a:solidFill>
-                        <a:srgbClr val="EDDED4"/>
+                        <a:srgbClr val="F6E2D5"/>
                       </a:solidFill>
                       <a:prstDash val="solid"/>
                     </a:lnT>
                     <a:lnB w="9525" cap="flat" cmpd="sng" algn="ctr">
                       <a:solidFill>
-                        <a:srgbClr val="EDDED4"/>
+                        <a:srgbClr val="F6E2D5"/>
                       </a:solidFill>
                       <a:prstDash val="solid"/>
                     </a:lnB>
                     <a:solidFill>
-                      <a:srgbClr val="EDDED4"/>
+                      <a:srgbClr val="F6E2D5"/>
                     </a:solidFill>
                   </a:tcPr>
                 </a:tc>
@@ -4041,7 +4203,7 @@
                       <a:r>
                         <a:rPr sz="1500" b="0">
                           <a:solidFill>
-                            <a:srgbClr val="2B2B2B"/>
+                            <a:srgbClr val="26231F"/>
                           </a:solidFill>
                         </a:rPr>
                         <a:t>입력하세요</a:t>
@@ -4051,30 +4213,30 @@
                   <a:tcPr anchor="ctr" marL="73152" marR="73152">
                     <a:lnL w="9525" cap="flat" cmpd="sng" algn="ctr">
                       <a:solidFill>
-                        <a:srgbClr val="EDDED4"/>
+                        <a:srgbClr val="F6E2D5"/>
                       </a:solidFill>
                       <a:prstDash val="solid"/>
                     </a:lnL>
                     <a:lnR w="9525" cap="flat" cmpd="sng" algn="ctr">
                       <a:solidFill>
-                        <a:srgbClr val="EDDED4"/>
+                        <a:srgbClr val="F6E2D5"/>
                       </a:solidFill>
                       <a:prstDash val="solid"/>
                     </a:lnR>
                     <a:lnT w="9525" cap="flat" cmpd="sng" algn="ctr">
                       <a:solidFill>
-                        <a:srgbClr val="EDDED4"/>
+                        <a:srgbClr val="F6E2D5"/>
                       </a:solidFill>
                       <a:prstDash val="solid"/>
                     </a:lnT>
                     <a:lnB w="9525" cap="flat" cmpd="sng" algn="ctr">
                       <a:solidFill>
-                        <a:srgbClr val="EDDED4"/>
+                        <a:srgbClr val="F6E2D5"/>
                       </a:solidFill>
                       <a:prstDash val="solid"/>
                     </a:lnB>
                     <a:solidFill>
-                      <a:srgbClr val="F8F4F1"/>
+                      <a:srgbClr val="FBF2EC"/>
                     </a:solidFill>
                   </a:tcPr>
                 </a:tc>
@@ -4089,7 +4251,7 @@
                       <a:r>
                         <a:rPr sz="1500" b="1">
                           <a:solidFill>
-                            <a:srgbClr val="37261A"/>
+                            <a:srgbClr val="493527"/>
                           </a:solidFill>
                         </a:rPr>
                         <a:t>부모의 마음</a:t>
@@ -4099,30 +4261,30 @@
                   <a:tcPr anchor="ctr" marL="73152" marR="73152">
                     <a:lnL w="9525" cap="flat" cmpd="sng" algn="ctr">
                       <a:solidFill>
-                        <a:srgbClr val="EDDED4"/>
+                        <a:srgbClr val="F6E2D5"/>
                       </a:solidFill>
                       <a:prstDash val="solid"/>
                     </a:lnL>
                     <a:lnR w="9525" cap="flat" cmpd="sng" algn="ctr">
                       <a:solidFill>
-                        <a:srgbClr val="EDDED4"/>
+                        <a:srgbClr val="F6E2D5"/>
                       </a:solidFill>
                       <a:prstDash val="solid"/>
                     </a:lnR>
                     <a:lnT w="9525" cap="flat" cmpd="sng" algn="ctr">
                       <a:solidFill>
-                        <a:srgbClr val="EDDED4"/>
+                        <a:srgbClr val="F6E2D5"/>
                       </a:solidFill>
                       <a:prstDash val="solid"/>
                     </a:lnT>
                     <a:lnB w="9525" cap="flat" cmpd="sng" algn="ctr">
                       <a:solidFill>
-                        <a:srgbClr val="EDDED4"/>
+                        <a:srgbClr val="F6E2D5"/>
                       </a:solidFill>
                       <a:prstDash val="solid"/>
                     </a:lnB>
                     <a:solidFill>
-                      <a:srgbClr val="EDDED4"/>
+                      <a:srgbClr val="F6E2D5"/>
                     </a:solidFill>
                   </a:tcPr>
                 </a:tc>
@@ -4135,7 +4297,7 @@
                       <a:r>
                         <a:rPr sz="1500" b="0">
                           <a:solidFill>
-                            <a:srgbClr val="2B2B2B"/>
+                            <a:srgbClr val="26231F"/>
                           </a:solidFill>
                         </a:rPr>
                         <a:t>입력하세요</a:t>
@@ -4145,25 +4307,25 @@
                   <a:tcPr anchor="ctr" marL="73152" marR="73152">
                     <a:lnL w="9525" cap="flat" cmpd="sng" algn="ctr">
                       <a:solidFill>
-                        <a:srgbClr val="EDDED4"/>
+                        <a:srgbClr val="F6E2D5"/>
                       </a:solidFill>
                       <a:prstDash val="solid"/>
                     </a:lnL>
                     <a:lnR w="9525" cap="flat" cmpd="sng" algn="ctr">
                       <a:solidFill>
-                        <a:srgbClr val="EDDED4"/>
+                        <a:srgbClr val="F6E2D5"/>
                       </a:solidFill>
                       <a:prstDash val="solid"/>
                     </a:lnR>
                     <a:lnT w="9525" cap="flat" cmpd="sng" algn="ctr">
                       <a:solidFill>
-                        <a:srgbClr val="EDDED4"/>
+                        <a:srgbClr val="F6E2D5"/>
                       </a:solidFill>
                       <a:prstDash val="solid"/>
                     </a:lnT>
                     <a:lnB w="9525" cap="flat" cmpd="sng" algn="ctr">
                       <a:solidFill>
-                        <a:srgbClr val="EDDED4"/>
+                        <a:srgbClr val="F6E2D5"/>
                       </a:solidFill>
                       <a:prstDash val="solid"/>
                     </a:lnB>
@@ -4191,7 +4353,7 @@
     <p:bg>
       <p:bgPr>
         <a:solidFill>
-          <a:srgbClr val="FFFFFF"/>
+          <a:srgbClr val="FBF2EC"/>
         </a:solidFill>
         <a:effectLst/>
       </p:bgPr>
@@ -4211,14 +4373,14 @@
         </p:nvSpPr>
         <p:spPr>
           <a:xfrm>
-            <a:off x="0" y="384048"/>
-            <a:ext cx="9509522" cy="896112"/>
-          </a:xfrm>
-          <a:prstGeom prst="homePlate">
+            <a:off x="640080" y="566928"/>
+            <a:ext cx="10911535" cy="10972"/>
+          </a:xfrm>
+          <a:prstGeom prst="rect">
             <a:avLst/>
           </a:prstGeom>
           <a:solidFill>
-            <a:srgbClr val="765037"/>
+            <a:srgbClr val="26231F"/>
           </a:solidFill>
           <a:ln>
             <a:noFill/>
@@ -4234,6 +4396,73 @@
       </p:sp>
       <p:sp>
         <p:nvSpPr>
+          <p:cNvPr id="4" name="상단 라벨"/>
+          <p:cNvSpPr txBox="1"/>
+          <p:nvPr/>
+        </p:nvSpPr>
+        <p:spPr>
+          <a:xfrm>
+            <a:off x="640080" y="237744"/>
+            <a:ext cx="5486400" cy="274320"/>
+          </a:xfrm>
+          <a:prstGeom prst="rect">
+            <a:avLst/>
+          </a:prstGeom>
+          <a:noFill/>
+        </p:spPr>
+        <p:txBody>
+          <a:bodyPr wrap="square" lIns="54864" rIns="54864" tIns="27432" bIns="27432" anchor="ctr">
+            <a:noAutofit/>
+          </a:bodyPr>
+          <a:lstStyle/>
+          <a:p>
+            <a:pPr algn="l">
+              <a:lnSpc>
+                <a:spcPct val="115000"/>
+              </a:lnSpc>
+            </a:pPr>
+            <a:r>
+              <a:rPr sz="900" b="1" i="0" spc="250">
+                <a:solidFill>
+                  <a:srgbClr val="26231F"/>
+                </a:solidFill>
+              </a:rPr>
+              <a:t>FIRST BIRTHDAY</a:t>
+            </a:r>
+          </a:p>
+        </p:txBody>
+      </p:sp>
+      <p:sp>
+        <p:nvSpPr>
+          <p:cNvPr id="5" name="포인트"/>
+          <p:cNvSpPr/>
+          <p:nvPr/>
+        </p:nvSpPr>
+        <p:spPr>
+          <a:xfrm>
+            <a:off x="11204143" y="246888"/>
+            <a:ext cx="237744" cy="237744"/>
+          </a:xfrm>
+          <a:prstGeom prst="donut">
+            <a:avLst/>
+          </a:prstGeom>
+          <a:solidFill>
+            <a:srgbClr val="D89F79"/>
+          </a:solidFill>
+          <a:ln>
+            <a:noFill/>
+          </a:ln>
+        </p:spPr>
+        <p:txBody>
+          <a:bodyPr rtlCol="0" anchor="ctr"/>
+          <a:lstStyle/>
+          <a:p>
+            <a:pPr algn="ctr"/>
+          </a:p>
+        </p:txBody>
+      </p:sp>
+      <p:sp>
+        <p:nvSpPr>
           <p:cNvPr id="2" name="Title 1"/>
           <p:cNvSpPr>
             <a:spLocks noGrp="1"/>
@@ -4244,8 +4473,8 @@
         </p:nvSpPr>
         <p:spPr>
           <a:xfrm>
-            <a:off x="640080" y="411480"/>
-            <a:ext cx="8412242" cy="822960"/>
+            <a:off x="640080" y="731520"/>
+            <a:ext cx="10911535" cy="822960"/>
           </a:xfrm>
         </p:spPr>
         <p:txBody>
@@ -4262,7 +4491,7 @@
             <a:r>
               <a:rPr sz="3000" b="1" i="0">
                 <a:solidFill>
-                  <a:srgbClr val="FFFFFF"/>
+                  <a:srgbClr val="26231F"/>
                 </a:solidFill>
               </a:rPr>
               <a:t>돌잡이 이야기</a:t>
@@ -4272,27 +4501,25 @@
       </p:sp>
       <p:sp>
         <p:nvSpPr>
-          <p:cNvPr id="4" name="카드 1"/>
+          <p:cNvPr id="6" name="카드 1"/>
           <p:cNvSpPr/>
           <p:nvPr/>
         </p:nvSpPr>
         <p:spPr>
           <a:xfrm>
-            <a:off x="640080" y="1645920"/>
-            <a:ext cx="2556433" cy="4754880"/>
+            <a:off x="640080" y="1783080"/>
+            <a:ext cx="2556433" cy="4572000"/>
           </a:xfrm>
           <a:prstGeom prst="roundRect">
             <a:avLst>
-              <a:gd name="adj" fmla="val 8000"/>
+              <a:gd name="adj" fmla="val 4000"/>
             </a:avLst>
           </a:prstGeom>
           <a:solidFill>
-            <a:srgbClr val="F8F4F1"/>
+            <a:srgbClr val="FBF2EC"/>
           </a:solidFill>
-          <a:ln w="15875">
-            <a:solidFill>
-              <a:srgbClr val="EDDED4"/>
-            </a:solidFill>
+          <a:ln>
+            <a:noFill/>
           </a:ln>
         </p:spPr>
         <p:txBody>
@@ -4305,20 +4532,49 @@
       </p:sp>
       <p:sp>
         <p:nvSpPr>
-          <p:cNvPr id="5" name="번호 1"/>
+          <p:cNvPr id="7" name="포인트 막대"/>
           <p:cNvSpPr/>
           <p:nvPr/>
         </p:nvSpPr>
         <p:spPr>
           <a:xfrm>
-            <a:off x="822959" y="1828800"/>
+            <a:off x="640080" y="1892807"/>
+            <a:ext cx="54864" cy="4352544"/>
+          </a:xfrm>
+          <a:prstGeom prst="rect">
+            <a:avLst/>
+          </a:prstGeom>
+          <a:solidFill>
+            <a:srgbClr val="D89F79"/>
+          </a:solidFill>
+          <a:ln>
+            <a:noFill/>
+          </a:ln>
+        </p:spPr>
+        <p:txBody>
+          <a:bodyPr rtlCol="0" anchor="ctr"/>
+          <a:lstStyle/>
+          <a:p>
+            <a:pPr algn="ctr"/>
+          </a:p>
+        </p:txBody>
+      </p:sp>
+      <p:sp>
+        <p:nvSpPr>
+          <p:cNvPr id="8" name="번호 1"/>
+          <p:cNvSpPr/>
+          <p:nvPr/>
+        </p:nvSpPr>
+        <p:spPr>
+          <a:xfrm>
+            <a:off x="822959" y="1965960"/>
             <a:ext cx="457200" cy="457200"/>
           </a:xfrm>
           <a:prstGeom prst="ellipse">
             <a:avLst/>
           </a:prstGeom>
           <a:solidFill>
-            <a:srgbClr val="765037"/>
+            <a:srgbClr val="D89F79"/>
           </a:solidFill>
           <a:ln>
             <a:noFill/>
@@ -4338,7 +4594,7 @@
             <a:r>
               <a:rPr sz="1600" b="1" i="0">
                 <a:solidFill>
-                  <a:srgbClr val="FFFFFF"/>
+                  <a:srgbClr val="26231F"/>
                 </a:solidFill>
               </a:rPr>
               <a:t>1</a:t>
@@ -4348,13 +4604,13 @@
       </p:sp>
       <p:sp>
         <p:nvSpPr>
-          <p:cNvPr id="6" name="TextBox 5"/>
+          <p:cNvPr id="9" name="TextBox 8"/>
           <p:cNvSpPr txBox="1"/>
           <p:nvPr/>
         </p:nvSpPr>
         <p:spPr>
           <a:xfrm>
-            <a:off x="777240" y="2423160"/>
+            <a:off x="777240" y="2560320"/>
             <a:ext cx="2282113" cy="640080"/>
           </a:xfrm>
           <a:prstGeom prst="rect">
@@ -4376,7 +4632,7 @@
             <a:r>
               <a:rPr sz="1600" b="1" i="0">
                 <a:solidFill>
-                  <a:srgbClr val="37261A"/>
+                  <a:srgbClr val="493527"/>
                 </a:solidFill>
               </a:rPr>
               <a:t>연필 · 공부</a:t>
@@ -4386,14 +4642,14 @@
       </p:sp>
       <p:sp>
         <p:nvSpPr>
-          <p:cNvPr id="7" name="TextBox 6"/>
+          <p:cNvPr id="10" name="TextBox 9"/>
           <p:cNvSpPr txBox="1"/>
           <p:nvPr/>
         </p:nvSpPr>
         <p:spPr>
           <a:xfrm>
-            <a:off x="777240" y="3108960"/>
-            <a:ext cx="2282113" cy="3154679"/>
+            <a:off x="777240" y="3246120"/>
+            <a:ext cx="2282113" cy="2971800"/>
           </a:xfrm>
           <a:prstGeom prst="rect">
             <a:avLst/>
@@ -4414,7 +4670,7 @@
             <a:r>
               <a:rPr sz="1400" b="0" i="0">
                 <a:solidFill>
-                  <a:srgbClr val="2B2B2B"/>
+                  <a:srgbClr val="26231F"/>
                 </a:solidFill>
               </a:rPr>
               <a:t>학문과 총명을 바라는 마음</a:t>
@@ -4424,27 +4680,25 @@
       </p:sp>
       <p:sp>
         <p:nvSpPr>
-          <p:cNvPr id="8" name="카드 2"/>
+          <p:cNvPr id="11" name="카드 2"/>
           <p:cNvSpPr/>
           <p:nvPr/>
         </p:nvSpPr>
         <p:spPr>
           <a:xfrm>
-            <a:off x="3425113" y="1645920"/>
-            <a:ext cx="2556433" cy="4754880"/>
+            <a:off x="3425113" y="1783080"/>
+            <a:ext cx="2556433" cy="4572000"/>
           </a:xfrm>
           <a:prstGeom prst="roundRect">
             <a:avLst>
-              <a:gd name="adj" fmla="val 8000"/>
+              <a:gd name="adj" fmla="val 4000"/>
             </a:avLst>
           </a:prstGeom>
           <a:solidFill>
-            <a:srgbClr val="F8F4F1"/>
+            <a:srgbClr val="FBF2EC"/>
           </a:solidFill>
-          <a:ln w="15875">
-            <a:solidFill>
-              <a:srgbClr val="EDDED4"/>
-            </a:solidFill>
+          <a:ln>
+            <a:noFill/>
           </a:ln>
         </p:spPr>
         <p:txBody>
@@ -4457,20 +4711,49 @@
       </p:sp>
       <p:sp>
         <p:nvSpPr>
-          <p:cNvPr id="9" name="번호 2"/>
+          <p:cNvPr id="12" name="포인트 막대"/>
           <p:cNvSpPr/>
           <p:nvPr/>
         </p:nvSpPr>
         <p:spPr>
           <a:xfrm>
-            <a:off x="3607993" y="1828800"/>
+            <a:off x="3425113" y="1892807"/>
+            <a:ext cx="54864" cy="4352544"/>
+          </a:xfrm>
+          <a:prstGeom prst="rect">
+            <a:avLst/>
+          </a:prstGeom>
+          <a:solidFill>
+            <a:srgbClr val="D89F79"/>
+          </a:solidFill>
+          <a:ln>
+            <a:noFill/>
+          </a:ln>
+        </p:spPr>
+        <p:txBody>
+          <a:bodyPr rtlCol="0" anchor="ctr"/>
+          <a:lstStyle/>
+          <a:p>
+            <a:pPr algn="ctr"/>
+          </a:p>
+        </p:txBody>
+      </p:sp>
+      <p:sp>
+        <p:nvSpPr>
+          <p:cNvPr id="13" name="번호 2"/>
+          <p:cNvSpPr/>
+          <p:nvPr/>
+        </p:nvSpPr>
+        <p:spPr>
+          <a:xfrm>
+            <a:off x="3607993" y="1965960"/>
             <a:ext cx="457200" cy="457200"/>
           </a:xfrm>
           <a:prstGeom prst="ellipse">
             <a:avLst/>
           </a:prstGeom>
           <a:solidFill>
-            <a:srgbClr val="765037"/>
+            <a:srgbClr val="D89F79"/>
           </a:solidFill>
           <a:ln>
             <a:noFill/>
@@ -4490,7 +4773,7 @@
             <a:r>
               <a:rPr sz="1600" b="1" i="0">
                 <a:solidFill>
-                  <a:srgbClr val="FFFFFF"/>
+                  <a:srgbClr val="26231F"/>
                 </a:solidFill>
               </a:rPr>
               <a:t>2</a:t>
@@ -4500,13 +4783,13 @@
       </p:sp>
       <p:sp>
         <p:nvSpPr>
-          <p:cNvPr id="10" name="TextBox 9"/>
+          <p:cNvPr id="14" name="TextBox 13"/>
           <p:cNvSpPr txBox="1"/>
           <p:nvPr/>
         </p:nvSpPr>
         <p:spPr>
           <a:xfrm>
-            <a:off x="3562273" y="2423160"/>
+            <a:off x="3562273" y="2560320"/>
             <a:ext cx="2282113" cy="640080"/>
           </a:xfrm>
           <a:prstGeom prst="rect">
@@ -4528,7 +4811,7 @@
             <a:r>
               <a:rPr sz="1600" b="1" i="0">
                 <a:solidFill>
-                  <a:srgbClr val="37261A"/>
+                  <a:srgbClr val="493527"/>
                 </a:solidFill>
               </a:rPr>
               <a:t>실 · 장수</a:t>
@@ -4538,14 +4821,14 @@
       </p:sp>
       <p:sp>
         <p:nvSpPr>
-          <p:cNvPr id="11" name="TextBox 10"/>
+          <p:cNvPr id="15" name="TextBox 14"/>
           <p:cNvSpPr txBox="1"/>
           <p:nvPr/>
         </p:nvSpPr>
         <p:spPr>
           <a:xfrm>
-            <a:off x="3562273" y="3108960"/>
-            <a:ext cx="2282113" cy="3154679"/>
+            <a:off x="3562273" y="3246120"/>
+            <a:ext cx="2282113" cy="2971800"/>
           </a:xfrm>
           <a:prstGeom prst="rect">
             <a:avLst/>
@@ -4566,7 +4849,7 @@
             <a:r>
               <a:rPr sz="1400" b="0" i="0">
                 <a:solidFill>
-                  <a:srgbClr val="2B2B2B"/>
+                  <a:srgbClr val="26231F"/>
                 </a:solidFill>
               </a:rPr>
               <a:t>건강하고 오래 살기를</a:t>
@@ -4576,27 +4859,25 @@
       </p:sp>
       <p:sp>
         <p:nvSpPr>
-          <p:cNvPr id="12" name="카드 3"/>
+          <p:cNvPr id="16" name="카드 3"/>
           <p:cNvSpPr/>
           <p:nvPr/>
         </p:nvSpPr>
         <p:spPr>
           <a:xfrm>
-            <a:off x="6210147" y="1645920"/>
-            <a:ext cx="2556433" cy="4754880"/>
+            <a:off x="6210147" y="1783080"/>
+            <a:ext cx="2556433" cy="4572000"/>
           </a:xfrm>
           <a:prstGeom prst="roundRect">
             <a:avLst>
-              <a:gd name="adj" fmla="val 8000"/>
+              <a:gd name="adj" fmla="val 4000"/>
             </a:avLst>
           </a:prstGeom>
           <a:solidFill>
-            <a:srgbClr val="F8F4F1"/>
+            <a:srgbClr val="FBF2EC"/>
           </a:solidFill>
-          <a:ln w="15875">
-            <a:solidFill>
-              <a:srgbClr val="EDDED4"/>
-            </a:solidFill>
+          <a:ln>
+            <a:noFill/>
           </a:ln>
         </p:spPr>
         <p:txBody>
@@ -4609,20 +4890,49 @@
       </p:sp>
       <p:sp>
         <p:nvSpPr>
-          <p:cNvPr id="13" name="번호 3"/>
+          <p:cNvPr id="17" name="포인트 막대"/>
           <p:cNvSpPr/>
           <p:nvPr/>
         </p:nvSpPr>
         <p:spPr>
           <a:xfrm>
-            <a:off x="6393027" y="1828800"/>
+            <a:off x="6210147" y="1892807"/>
+            <a:ext cx="54864" cy="4352544"/>
+          </a:xfrm>
+          <a:prstGeom prst="rect">
+            <a:avLst/>
+          </a:prstGeom>
+          <a:solidFill>
+            <a:srgbClr val="D89F79"/>
+          </a:solidFill>
+          <a:ln>
+            <a:noFill/>
+          </a:ln>
+        </p:spPr>
+        <p:txBody>
+          <a:bodyPr rtlCol="0" anchor="ctr"/>
+          <a:lstStyle/>
+          <a:p>
+            <a:pPr algn="ctr"/>
+          </a:p>
+        </p:txBody>
+      </p:sp>
+      <p:sp>
+        <p:nvSpPr>
+          <p:cNvPr id="18" name="번호 3"/>
+          <p:cNvSpPr/>
+          <p:nvPr/>
+        </p:nvSpPr>
+        <p:spPr>
+          <a:xfrm>
+            <a:off x="6393027" y="1965960"/>
             <a:ext cx="457200" cy="457200"/>
           </a:xfrm>
           <a:prstGeom prst="ellipse">
             <a:avLst/>
           </a:prstGeom>
           <a:solidFill>
-            <a:srgbClr val="765037"/>
+            <a:srgbClr val="D89F79"/>
           </a:solidFill>
           <a:ln>
             <a:noFill/>
@@ -4642,7 +4952,7 @@
             <a:r>
               <a:rPr sz="1600" b="1" i="0">
                 <a:solidFill>
-                  <a:srgbClr val="FFFFFF"/>
+                  <a:srgbClr val="26231F"/>
                 </a:solidFill>
               </a:rPr>
               <a:t>3</a:t>
@@ -4652,13 +4962,13 @@
       </p:sp>
       <p:sp>
         <p:nvSpPr>
-          <p:cNvPr id="14" name="TextBox 13"/>
+          <p:cNvPr id="19" name="TextBox 18"/>
           <p:cNvSpPr txBox="1"/>
           <p:nvPr/>
         </p:nvSpPr>
         <p:spPr>
           <a:xfrm>
-            <a:off x="6347307" y="2423160"/>
+            <a:off x="6347307" y="2560320"/>
             <a:ext cx="2282113" cy="640080"/>
           </a:xfrm>
           <a:prstGeom prst="rect">
@@ -4680,7 +4990,7 @@
             <a:r>
               <a:rPr sz="1600" b="1" i="0">
                 <a:solidFill>
-                  <a:srgbClr val="37261A"/>
+                  <a:srgbClr val="493527"/>
                 </a:solidFill>
               </a:rPr>
               <a:t>돈 · 부</a:t>
@@ -4690,14 +5000,14 @@
       </p:sp>
       <p:sp>
         <p:nvSpPr>
-          <p:cNvPr id="15" name="TextBox 14"/>
+          <p:cNvPr id="20" name="TextBox 19"/>
           <p:cNvSpPr txBox="1"/>
           <p:nvPr/>
         </p:nvSpPr>
         <p:spPr>
           <a:xfrm>
-            <a:off x="6347307" y="3108960"/>
-            <a:ext cx="2282113" cy="3154679"/>
+            <a:off x="6347307" y="3246120"/>
+            <a:ext cx="2282113" cy="2971800"/>
           </a:xfrm>
           <a:prstGeom prst="rect">
             <a:avLst/>
@@ -4718,7 +5028,7 @@
             <a:r>
               <a:rPr sz="1400" b="0" i="0">
                 <a:solidFill>
-                  <a:srgbClr val="2B2B2B"/>
+                  <a:srgbClr val="26231F"/>
                 </a:solidFill>
               </a:rPr>
               <a:t>넉넉한 삶을 바라는 마음</a:t>
@@ -4728,27 +5038,25 @@
       </p:sp>
       <p:sp>
         <p:nvSpPr>
-          <p:cNvPr id="16" name="카드 4"/>
+          <p:cNvPr id="21" name="카드 4"/>
           <p:cNvSpPr/>
           <p:nvPr/>
         </p:nvSpPr>
         <p:spPr>
           <a:xfrm>
-            <a:off x="8995181" y="1645920"/>
-            <a:ext cx="2556433" cy="4754880"/>
+            <a:off x="8995181" y="1783080"/>
+            <a:ext cx="2556433" cy="4572000"/>
           </a:xfrm>
           <a:prstGeom prst="roundRect">
             <a:avLst>
-              <a:gd name="adj" fmla="val 8000"/>
+              <a:gd name="adj" fmla="val 4000"/>
             </a:avLst>
           </a:prstGeom>
           <a:solidFill>
-            <a:srgbClr val="F8F4F1"/>
+            <a:srgbClr val="FBF2EC"/>
           </a:solidFill>
-          <a:ln w="15875">
-            <a:solidFill>
-              <a:srgbClr val="EDDED4"/>
-            </a:solidFill>
+          <a:ln>
+            <a:noFill/>
           </a:ln>
         </p:spPr>
         <p:txBody>
@@ -4761,20 +5069,49 @@
       </p:sp>
       <p:sp>
         <p:nvSpPr>
-          <p:cNvPr id="17" name="번호 4"/>
+          <p:cNvPr id="22" name="포인트 막대"/>
           <p:cNvSpPr/>
           <p:nvPr/>
         </p:nvSpPr>
         <p:spPr>
           <a:xfrm>
-            <a:off x="9178061" y="1828800"/>
+            <a:off x="8995181" y="1892807"/>
+            <a:ext cx="54864" cy="4352544"/>
+          </a:xfrm>
+          <a:prstGeom prst="rect">
+            <a:avLst/>
+          </a:prstGeom>
+          <a:solidFill>
+            <a:srgbClr val="D89F79"/>
+          </a:solidFill>
+          <a:ln>
+            <a:noFill/>
+          </a:ln>
+        </p:spPr>
+        <p:txBody>
+          <a:bodyPr rtlCol="0" anchor="ctr"/>
+          <a:lstStyle/>
+          <a:p>
+            <a:pPr algn="ctr"/>
+          </a:p>
+        </p:txBody>
+      </p:sp>
+      <p:sp>
+        <p:nvSpPr>
+          <p:cNvPr id="23" name="번호 4"/>
+          <p:cNvSpPr/>
+          <p:nvPr/>
+        </p:nvSpPr>
+        <p:spPr>
+          <a:xfrm>
+            <a:off x="9178061" y="1965960"/>
             <a:ext cx="457200" cy="457200"/>
           </a:xfrm>
           <a:prstGeom prst="ellipse">
             <a:avLst/>
           </a:prstGeom>
           <a:solidFill>
-            <a:srgbClr val="765037"/>
+            <a:srgbClr val="D89F79"/>
           </a:solidFill>
           <a:ln>
             <a:noFill/>
@@ -4794,7 +5131,7 @@
             <a:r>
               <a:rPr sz="1600" b="1" i="0">
                 <a:solidFill>
-                  <a:srgbClr val="FFFFFF"/>
+                  <a:srgbClr val="26231F"/>
                 </a:solidFill>
               </a:rPr>
               <a:t>4</a:t>
@@ -4804,13 +5141,13 @@
       </p:sp>
       <p:sp>
         <p:nvSpPr>
-          <p:cNvPr id="18" name="TextBox 17"/>
+          <p:cNvPr id="24" name="TextBox 23"/>
           <p:cNvSpPr txBox="1"/>
           <p:nvPr/>
         </p:nvSpPr>
         <p:spPr>
           <a:xfrm>
-            <a:off x="9132341" y="2423160"/>
+            <a:off x="9132341" y="2560320"/>
             <a:ext cx="2282113" cy="640080"/>
           </a:xfrm>
           <a:prstGeom prst="rect">
@@ -4832,7 +5169,7 @@
             <a:r>
               <a:rPr sz="1600" b="1" i="0">
                 <a:solidFill>
-                  <a:srgbClr val="37261A"/>
+                  <a:srgbClr val="493527"/>
                 </a:solidFill>
               </a:rPr>
               <a:t>마이크 · 인기</a:t>
@@ -4842,14 +5179,14 @@
       </p:sp>
       <p:sp>
         <p:nvSpPr>
-          <p:cNvPr id="19" name="TextBox 18"/>
+          <p:cNvPr id="25" name="TextBox 24"/>
           <p:cNvSpPr txBox="1"/>
           <p:nvPr/>
         </p:nvSpPr>
         <p:spPr>
           <a:xfrm>
-            <a:off x="9132341" y="3108960"/>
-            <a:ext cx="2282113" cy="3154679"/>
+            <a:off x="9132341" y="3246120"/>
+            <a:ext cx="2282113" cy="2971800"/>
           </a:xfrm>
           <a:prstGeom prst="rect">
             <a:avLst/>
@@ -4870,7 +5207,7 @@
             <a:r>
               <a:rPr sz="1400" b="0" i="0">
                 <a:solidFill>
-                  <a:srgbClr val="2B2B2B"/>
+                  <a:srgbClr val="26231F"/>
                 </a:solidFill>
               </a:rPr>
               <a:t>사람들에게 사랑받기를</a:t>
@@ -4892,7 +5229,7 @@
     <p:bg>
       <p:bgPr>
         <a:solidFill>
-          <a:srgbClr val="FFFFFF"/>
+          <a:srgbClr val="FBF2EC"/>
         </a:solidFill>
         <a:effectLst/>
       </p:bgPr>
@@ -4912,14 +5249,14 @@
         </p:nvSpPr>
         <p:spPr>
           <a:xfrm>
-            <a:off x="0" y="384048"/>
-            <a:ext cx="9509522" cy="896112"/>
-          </a:xfrm>
-          <a:prstGeom prst="homePlate">
+            <a:off x="640080" y="566928"/>
+            <a:ext cx="10911535" cy="10972"/>
+          </a:xfrm>
+          <a:prstGeom prst="rect">
             <a:avLst/>
           </a:prstGeom>
           <a:solidFill>
-            <a:srgbClr val="765037"/>
+            <a:srgbClr val="26231F"/>
           </a:solidFill>
           <a:ln>
             <a:noFill/>
@@ -4935,6 +5272,73 @@
       </p:sp>
       <p:sp>
         <p:nvSpPr>
+          <p:cNvPr id="4" name="상단 라벨"/>
+          <p:cNvSpPr txBox="1"/>
+          <p:nvPr/>
+        </p:nvSpPr>
+        <p:spPr>
+          <a:xfrm>
+            <a:off x="640080" y="237744"/>
+            <a:ext cx="5486400" cy="274320"/>
+          </a:xfrm>
+          <a:prstGeom prst="rect">
+            <a:avLst/>
+          </a:prstGeom>
+          <a:noFill/>
+        </p:spPr>
+        <p:txBody>
+          <a:bodyPr wrap="square" lIns="54864" rIns="54864" tIns="27432" bIns="27432" anchor="ctr">
+            <a:noAutofit/>
+          </a:bodyPr>
+          <a:lstStyle/>
+          <a:p>
+            <a:pPr algn="l">
+              <a:lnSpc>
+                <a:spcPct val="115000"/>
+              </a:lnSpc>
+            </a:pPr>
+            <a:r>
+              <a:rPr sz="900" b="1" i="0" spc="250">
+                <a:solidFill>
+                  <a:srgbClr val="26231F"/>
+                </a:solidFill>
+              </a:rPr>
+              <a:t>FIRST BIRTHDAY</a:t>
+            </a:r>
+          </a:p>
+        </p:txBody>
+      </p:sp>
+      <p:sp>
+        <p:nvSpPr>
+          <p:cNvPr id="5" name="포인트"/>
+          <p:cNvSpPr/>
+          <p:nvPr/>
+        </p:nvSpPr>
+        <p:spPr>
+          <a:xfrm>
+            <a:off x="11204143" y="246888"/>
+            <a:ext cx="237744" cy="237744"/>
+          </a:xfrm>
+          <a:prstGeom prst="donut">
+            <a:avLst/>
+          </a:prstGeom>
+          <a:solidFill>
+            <a:srgbClr val="D89F79"/>
+          </a:solidFill>
+          <a:ln>
+            <a:noFill/>
+          </a:ln>
+        </p:spPr>
+        <p:txBody>
+          <a:bodyPr rtlCol="0" anchor="ctr"/>
+          <a:lstStyle/>
+          <a:p>
+            <a:pPr algn="ctr"/>
+          </a:p>
+        </p:txBody>
+      </p:sp>
+      <p:sp>
+        <p:nvSpPr>
           <p:cNvPr id="2" name="Title 1"/>
           <p:cNvSpPr>
             <a:spLocks noGrp="1"/>
@@ -4945,8 +5349,8 @@
         </p:nvSpPr>
         <p:spPr>
           <a:xfrm>
-            <a:off x="640080" y="411480"/>
-            <a:ext cx="8412242" cy="822960"/>
+            <a:off x="640080" y="731520"/>
+            <a:ext cx="10911535" cy="822960"/>
           </a:xfrm>
         </p:spPr>
         <p:txBody>
@@ -4963,7 +5367,7 @@
             <a:r>
               <a:rPr sz="3000" b="1" i="0">
                 <a:solidFill>
-                  <a:srgbClr val="FFFFFF"/>
+                  <a:srgbClr val="26231F"/>
                 </a:solidFill>
               </a:rPr>
               <a:t>우리 아기의 선택은?</a:t>
@@ -4973,14 +5377,14 @@
       </p:sp>
       <p:sp>
         <p:nvSpPr>
-          <p:cNvPr id="4" name="사진 자리"/>
+          <p:cNvPr id="6" name="사진 자리"/>
           <p:cNvSpPr/>
           <p:nvPr/>
         </p:nvSpPr>
         <p:spPr>
           <a:xfrm>
-            <a:off x="640080" y="1645920"/>
-            <a:ext cx="4572000" cy="4754880"/>
+            <a:off x="640080" y="1783080"/>
+            <a:ext cx="4572000" cy="4572000"/>
           </a:xfrm>
           <a:prstGeom prst="roundRect">
             <a:avLst>
@@ -4988,12 +5392,10 @@
             </a:avLst>
           </a:prstGeom>
           <a:solidFill>
-            <a:srgbClr val="EDDED4"/>
+            <a:srgbClr val="F6E2D5"/>
           </a:solidFill>
           <a:ln w="19050">
-            <a:solidFill>
-              <a:srgbClr val="765037"/>
-            </a:solidFill>
+            <a:noFill/>
             <a:prstDash val="dash"/>
           </a:ln>
         </p:spPr>
@@ -5011,7 +5413,7 @@
             <a:r>
               <a:rPr sz="1400" b="0" i="0">
                 <a:solidFill>
-                  <a:srgbClr val="37261A"/>
+                  <a:srgbClr val="8E8780"/>
                 </a:solidFill>
               </a:rPr>
               <a:t>돌잡이 사진</a:t>
@@ -5021,27 +5423,25 @@
       </p:sp>
       <p:sp>
         <p:nvSpPr>
-          <p:cNvPr id="5" name="선택 칸"/>
+          <p:cNvPr id="7" name="선택 칸"/>
           <p:cNvSpPr/>
           <p:nvPr/>
         </p:nvSpPr>
         <p:spPr>
           <a:xfrm>
-            <a:off x="5577840" y="1645920"/>
-            <a:ext cx="5973775" cy="4754880"/>
+            <a:off x="5577840" y="1783080"/>
+            <a:ext cx="5973775" cy="4572000"/>
           </a:xfrm>
           <a:prstGeom prst="roundRect">
             <a:avLst>
-              <a:gd name="adj" fmla="val 8000"/>
+              <a:gd name="adj" fmla="val 4000"/>
             </a:avLst>
           </a:prstGeom>
           <a:solidFill>
-            <a:srgbClr val="F8F4F1"/>
+            <a:srgbClr val="FBF2EC"/>
           </a:solidFill>
-          <a:ln w="12700">
-            <a:solidFill>
-              <a:srgbClr val="EDDED4"/>
-            </a:solidFill>
+          <a:ln>
+            <a:noFill/>
           </a:ln>
         </p:spPr>
         <p:txBody>
@@ -5054,14 +5454,43 @@
       </p:sp>
       <p:sp>
         <p:nvSpPr>
-          <p:cNvPr id="6" name="TextBox 5"/>
+          <p:cNvPr id="8" name="포인트 막대"/>
+          <p:cNvSpPr/>
+          <p:nvPr/>
+        </p:nvSpPr>
+        <p:spPr>
+          <a:xfrm>
+            <a:off x="5577840" y="1892807"/>
+            <a:ext cx="54864" cy="4352544"/>
+          </a:xfrm>
+          <a:prstGeom prst="rect">
+            <a:avLst/>
+          </a:prstGeom>
+          <a:solidFill>
+            <a:srgbClr val="D89F79"/>
+          </a:solidFill>
+          <a:ln>
+            <a:noFill/>
+          </a:ln>
+        </p:spPr>
+        <p:txBody>
+          <a:bodyPr rtlCol="0" anchor="ctr"/>
+          <a:lstStyle/>
+          <a:p>
+            <a:pPr algn="ctr"/>
+          </a:p>
+        </p:txBody>
+      </p:sp>
+      <p:sp>
+        <p:nvSpPr>
+          <p:cNvPr id="9" name="TextBox 8"/>
           <p:cNvSpPr txBox="1"/>
           <p:nvPr/>
         </p:nvSpPr>
         <p:spPr>
           <a:xfrm>
-            <a:off x="5852160" y="1920240"/>
-            <a:ext cx="5425135" cy="4206240"/>
+            <a:off x="5852160" y="2057400"/>
+            <a:ext cx="5425135" cy="4023360"/>
           </a:xfrm>
           <a:prstGeom prst="rect">
             <a:avLst/>
@@ -5082,7 +5511,7 @@
             <a:r>
               <a:rPr sz="1800" b="0" i="0">
                 <a:solidFill>
-                  <a:srgbClr val="2B2B2B"/>
+                  <a:srgbClr val="26231F"/>
                 </a:solidFill>
               </a:rPr>
               <a:t>우리 아기의 선택</a:t>
@@ -5097,7 +5526,7 @@
             <a:r>
               <a:rPr sz="1800" b="0" i="0">
                 <a:solidFill>
-                  <a:srgbClr val="2B2B2B"/>
+                  <a:srgbClr val="26231F"/>
                 </a:solidFill>
               </a:rPr>
               <a:t/>
@@ -5112,7 +5541,7 @@
             <a:r>
               <a:rPr sz="1800" b="0" i="0">
                 <a:solidFill>
-                  <a:srgbClr val="2B2B2B"/>
+                  <a:srgbClr val="26231F"/>
                 </a:solidFill>
               </a:rPr>
               <a:t>무엇을 집었나요?</a:t>
@@ -5127,7 +5556,7 @@
             <a:r>
               <a:rPr sz="1800" b="0" i="0">
                 <a:solidFill>
-                  <a:srgbClr val="2B2B2B"/>
+                  <a:srgbClr val="26231F"/>
                 </a:solidFill>
               </a:rPr>
               <a:t/>
@@ -5142,7 +5571,7 @@
             <a:r>
               <a:rPr sz="1800" b="0" i="0">
                 <a:solidFill>
-                  <a:srgbClr val="2B2B2B"/>
+                  <a:srgbClr val="26231F"/>
                 </a:solidFill>
               </a:rPr>
               <a:t>그때 가족의 반응은?</a:t>
@@ -5164,7 +5593,7 @@
     <p:bg>
       <p:bgPr>
         <a:solidFill>
-          <a:srgbClr val="FFFFFF"/>
+          <a:srgbClr val="FBF2EC"/>
         </a:solidFill>
         <a:effectLst/>
       </p:bgPr>
@@ -5184,14 +5613,14 @@
         </p:nvSpPr>
         <p:spPr>
           <a:xfrm>
-            <a:off x="0" y="384048"/>
-            <a:ext cx="9509522" cy="896112"/>
-          </a:xfrm>
-          <a:prstGeom prst="homePlate">
+            <a:off x="640080" y="566928"/>
+            <a:ext cx="10911535" cy="10972"/>
+          </a:xfrm>
+          <a:prstGeom prst="rect">
             <a:avLst/>
           </a:prstGeom>
           <a:solidFill>
-            <a:srgbClr val="765037"/>
+            <a:srgbClr val="26231F"/>
           </a:solidFill>
           <a:ln>
             <a:noFill/>
@@ -5207,6 +5636,73 @@
       </p:sp>
       <p:sp>
         <p:nvSpPr>
+          <p:cNvPr id="4" name="상단 라벨"/>
+          <p:cNvSpPr txBox="1"/>
+          <p:nvPr/>
+        </p:nvSpPr>
+        <p:spPr>
+          <a:xfrm>
+            <a:off x="640080" y="237744"/>
+            <a:ext cx="5486400" cy="274320"/>
+          </a:xfrm>
+          <a:prstGeom prst="rect">
+            <a:avLst/>
+          </a:prstGeom>
+          <a:noFill/>
+        </p:spPr>
+        <p:txBody>
+          <a:bodyPr wrap="square" lIns="54864" rIns="54864" tIns="27432" bIns="27432" anchor="ctr">
+            <a:noAutofit/>
+          </a:bodyPr>
+          <a:lstStyle/>
+          <a:p>
+            <a:pPr algn="l">
+              <a:lnSpc>
+                <a:spcPct val="115000"/>
+              </a:lnSpc>
+            </a:pPr>
+            <a:r>
+              <a:rPr sz="900" b="1" i="0" spc="250">
+                <a:solidFill>
+                  <a:srgbClr val="26231F"/>
+                </a:solidFill>
+              </a:rPr>
+              <a:t>FIRST BIRTHDAY</a:t>
+            </a:r>
+          </a:p>
+        </p:txBody>
+      </p:sp>
+      <p:sp>
+        <p:nvSpPr>
+          <p:cNvPr id="5" name="포인트"/>
+          <p:cNvSpPr/>
+          <p:nvPr/>
+        </p:nvSpPr>
+        <p:spPr>
+          <a:xfrm>
+            <a:off x="11204143" y="246888"/>
+            <a:ext cx="237744" cy="237744"/>
+          </a:xfrm>
+          <a:prstGeom prst="donut">
+            <a:avLst/>
+          </a:prstGeom>
+          <a:solidFill>
+            <a:srgbClr val="D89F79"/>
+          </a:solidFill>
+          <a:ln>
+            <a:noFill/>
+          </a:ln>
+        </p:spPr>
+        <p:txBody>
+          <a:bodyPr rtlCol="0" anchor="ctr"/>
+          <a:lstStyle/>
+          <a:p>
+            <a:pPr algn="ctr"/>
+          </a:p>
+        </p:txBody>
+      </p:sp>
+      <p:sp>
+        <p:nvSpPr>
           <p:cNvPr id="2" name="Title 1"/>
           <p:cNvSpPr>
             <a:spLocks noGrp="1"/>
@@ -5217,8 +5713,8 @@
         </p:nvSpPr>
         <p:spPr>
           <a:xfrm>
-            <a:off x="640080" y="411480"/>
-            <a:ext cx="8412242" cy="822960"/>
+            <a:off x="640080" y="731520"/>
+            <a:ext cx="10911535" cy="822960"/>
           </a:xfrm>
         </p:spPr>
         <p:txBody>
@@ -5235,7 +5731,7 @@
             <a:r>
               <a:rPr sz="3000" b="1" i="0">
                 <a:solidFill>
-                  <a:srgbClr val="FFFFFF"/>
+                  <a:srgbClr val="26231F"/>
                 </a:solidFill>
               </a:rPr>
               <a:t>사진 모음</a:t>
@@ -5245,14 +5741,14 @@
       </p:sp>
       <p:sp>
         <p:nvSpPr>
-          <p:cNvPr id="4" name="사진 자리"/>
+          <p:cNvPr id="6" name="사진 자리"/>
           <p:cNvSpPr/>
           <p:nvPr/>
         </p:nvSpPr>
         <p:spPr>
           <a:xfrm>
-            <a:off x="640080" y="1645920"/>
-            <a:ext cx="2590723" cy="2286000"/>
+            <a:off x="640080" y="1783080"/>
+            <a:ext cx="2590723" cy="2194560"/>
           </a:xfrm>
           <a:prstGeom prst="roundRect">
             <a:avLst>
@@ -5260,12 +5756,10 @@
             </a:avLst>
           </a:prstGeom>
           <a:solidFill>
-            <a:srgbClr val="EDDED4"/>
+            <a:srgbClr val="F6E2D5"/>
           </a:solidFill>
           <a:ln w="19050">
-            <a:solidFill>
-              <a:srgbClr val="765037"/>
-            </a:solidFill>
+            <a:noFill/>
             <a:prstDash val="dash"/>
           </a:ln>
         </p:spPr>
@@ -5283,7 +5777,7 @@
             <a:r>
               <a:rPr sz="1200" b="0" i="0">
                 <a:solidFill>
-                  <a:srgbClr val="37261A"/>
+                  <a:srgbClr val="8E8780"/>
                 </a:solidFill>
               </a:rPr>
               <a:t>사진 1</a:t>
@@ -5293,14 +5787,14 @@
       </p:sp>
       <p:sp>
         <p:nvSpPr>
-          <p:cNvPr id="5" name="사진 자리"/>
+          <p:cNvPr id="7" name="사진 자리"/>
           <p:cNvSpPr/>
           <p:nvPr/>
         </p:nvSpPr>
         <p:spPr>
           <a:xfrm>
-            <a:off x="3413683" y="1645920"/>
-            <a:ext cx="2590723" cy="2286000"/>
+            <a:off x="3413683" y="1783080"/>
+            <a:ext cx="2590723" cy="2194560"/>
           </a:xfrm>
           <a:prstGeom prst="roundRect">
             <a:avLst>
@@ -5308,12 +5802,10 @@
             </a:avLst>
           </a:prstGeom>
           <a:solidFill>
-            <a:srgbClr val="EDDED4"/>
+            <a:srgbClr val="F6E2D5"/>
           </a:solidFill>
           <a:ln w="19050">
-            <a:solidFill>
-              <a:srgbClr val="765037"/>
-            </a:solidFill>
+            <a:noFill/>
             <a:prstDash val="dash"/>
           </a:ln>
         </p:spPr>
@@ -5331,7 +5823,7 @@
             <a:r>
               <a:rPr sz="1200" b="0" i="0">
                 <a:solidFill>
-                  <a:srgbClr val="37261A"/>
+                  <a:srgbClr val="8E8780"/>
                 </a:solidFill>
               </a:rPr>
               <a:t>사진 2</a:t>
@@ -5341,14 +5833,14 @@
       </p:sp>
       <p:sp>
         <p:nvSpPr>
-          <p:cNvPr id="6" name="사진 자리"/>
+          <p:cNvPr id="8" name="사진 자리"/>
           <p:cNvSpPr/>
           <p:nvPr/>
         </p:nvSpPr>
         <p:spPr>
           <a:xfrm>
-            <a:off x="6187287" y="1645920"/>
-            <a:ext cx="2590723" cy="2286000"/>
+            <a:off x="6187287" y="1783080"/>
+            <a:ext cx="2590723" cy="2194560"/>
           </a:xfrm>
           <a:prstGeom prst="roundRect">
             <a:avLst>
@@ -5356,12 +5848,10 @@
             </a:avLst>
           </a:prstGeom>
           <a:solidFill>
-            <a:srgbClr val="EDDED4"/>
+            <a:srgbClr val="F6E2D5"/>
           </a:solidFill>
           <a:ln w="19050">
-            <a:solidFill>
-              <a:srgbClr val="765037"/>
-            </a:solidFill>
+            <a:noFill/>
             <a:prstDash val="dash"/>
           </a:ln>
         </p:spPr>
@@ -5379,7 +5869,7 @@
             <a:r>
               <a:rPr sz="1200" b="0" i="0">
                 <a:solidFill>
-                  <a:srgbClr val="37261A"/>
+                  <a:srgbClr val="8E8780"/>
                 </a:solidFill>
               </a:rPr>
               <a:t>사진 3</a:t>
@@ -5389,14 +5879,14 @@
       </p:sp>
       <p:sp>
         <p:nvSpPr>
-          <p:cNvPr id="7" name="사진 자리"/>
+          <p:cNvPr id="9" name="사진 자리"/>
           <p:cNvSpPr/>
           <p:nvPr/>
         </p:nvSpPr>
         <p:spPr>
           <a:xfrm>
-            <a:off x="8960891" y="1645920"/>
-            <a:ext cx="2590723" cy="2286000"/>
+            <a:off x="8960891" y="1783080"/>
+            <a:ext cx="2590723" cy="2194560"/>
           </a:xfrm>
           <a:prstGeom prst="roundRect">
             <a:avLst>
@@ -5404,12 +5894,10 @@
             </a:avLst>
           </a:prstGeom>
           <a:solidFill>
-            <a:srgbClr val="EDDED4"/>
+            <a:srgbClr val="F6E2D5"/>
           </a:solidFill>
           <a:ln w="19050">
-            <a:solidFill>
-              <a:srgbClr val="765037"/>
-            </a:solidFill>
+            <a:noFill/>
             <a:prstDash val="dash"/>
           </a:ln>
         </p:spPr>
@@ -5427,7 +5915,7 @@
             <a:r>
               <a:rPr sz="1200" b="0" i="0">
                 <a:solidFill>
-                  <a:srgbClr val="37261A"/>
+                  <a:srgbClr val="8E8780"/>
                 </a:solidFill>
               </a:rPr>
               <a:t>사진 4</a:t>
@@ -5437,14 +5925,14 @@
       </p:sp>
       <p:sp>
         <p:nvSpPr>
-          <p:cNvPr id="8" name="사진 자리"/>
+          <p:cNvPr id="10" name="사진 자리"/>
           <p:cNvSpPr/>
           <p:nvPr/>
         </p:nvSpPr>
         <p:spPr>
           <a:xfrm>
-            <a:off x="640080" y="4114800"/>
-            <a:ext cx="2590723" cy="2286000"/>
+            <a:off x="640080" y="4160520"/>
+            <a:ext cx="2590723" cy="2194560"/>
           </a:xfrm>
           <a:prstGeom prst="roundRect">
             <a:avLst>
@@ -5452,12 +5940,10 @@
             </a:avLst>
           </a:prstGeom>
           <a:solidFill>
-            <a:srgbClr val="EDDED4"/>
+            <a:srgbClr val="F6E2D5"/>
           </a:solidFill>
           <a:ln w="19050">
-            <a:solidFill>
-              <a:srgbClr val="765037"/>
-            </a:solidFill>
+            <a:noFill/>
             <a:prstDash val="dash"/>
           </a:ln>
         </p:spPr>
@@ -5475,7 +5961,7 @@
             <a:r>
               <a:rPr sz="1200" b="0" i="0">
                 <a:solidFill>
-                  <a:srgbClr val="37261A"/>
+                  <a:srgbClr val="8E8780"/>
                 </a:solidFill>
               </a:rPr>
               <a:t>사진 5</a:t>
@@ -5485,14 +5971,14 @@
       </p:sp>
       <p:sp>
         <p:nvSpPr>
-          <p:cNvPr id="9" name="사진 자리"/>
+          <p:cNvPr id="11" name="사진 자리"/>
           <p:cNvSpPr/>
           <p:nvPr/>
         </p:nvSpPr>
         <p:spPr>
           <a:xfrm>
-            <a:off x="3413683" y="4114800"/>
-            <a:ext cx="2590723" cy="2286000"/>
+            <a:off x="3413683" y="4160520"/>
+            <a:ext cx="2590723" cy="2194560"/>
           </a:xfrm>
           <a:prstGeom prst="roundRect">
             <a:avLst>
@@ -5500,12 +5986,10 @@
             </a:avLst>
           </a:prstGeom>
           <a:solidFill>
-            <a:srgbClr val="EDDED4"/>
+            <a:srgbClr val="F6E2D5"/>
           </a:solidFill>
           <a:ln w="19050">
-            <a:solidFill>
-              <a:srgbClr val="765037"/>
-            </a:solidFill>
+            <a:noFill/>
             <a:prstDash val="dash"/>
           </a:ln>
         </p:spPr>
@@ -5523,7 +6007,7 @@
             <a:r>
               <a:rPr sz="1200" b="0" i="0">
                 <a:solidFill>
-                  <a:srgbClr val="37261A"/>
+                  <a:srgbClr val="8E8780"/>
                 </a:solidFill>
               </a:rPr>
               <a:t>사진 6</a:t>
@@ -5533,14 +6017,14 @@
       </p:sp>
       <p:sp>
         <p:nvSpPr>
-          <p:cNvPr id="10" name="사진 자리"/>
+          <p:cNvPr id="12" name="사진 자리"/>
           <p:cNvSpPr/>
           <p:nvPr/>
         </p:nvSpPr>
         <p:spPr>
           <a:xfrm>
-            <a:off x="6187287" y="4114800"/>
-            <a:ext cx="2590723" cy="2286000"/>
+            <a:off x="6187287" y="4160520"/>
+            <a:ext cx="2590723" cy="2194560"/>
           </a:xfrm>
           <a:prstGeom prst="roundRect">
             <a:avLst>
@@ -5548,12 +6032,10 @@
             </a:avLst>
           </a:prstGeom>
           <a:solidFill>
-            <a:srgbClr val="EDDED4"/>
+            <a:srgbClr val="F6E2D5"/>
           </a:solidFill>
           <a:ln w="19050">
-            <a:solidFill>
-              <a:srgbClr val="765037"/>
-            </a:solidFill>
+            <a:noFill/>
             <a:prstDash val="dash"/>
           </a:ln>
         </p:spPr>
@@ -5571,7 +6053,7 @@
             <a:r>
               <a:rPr sz="1200" b="0" i="0">
                 <a:solidFill>
-                  <a:srgbClr val="37261A"/>
+                  <a:srgbClr val="8E8780"/>
                 </a:solidFill>
               </a:rPr>
               <a:t>사진 7</a:t>
@@ -5581,14 +6063,14 @@
       </p:sp>
       <p:sp>
         <p:nvSpPr>
-          <p:cNvPr id="11" name="사진 자리"/>
+          <p:cNvPr id="13" name="사진 자리"/>
           <p:cNvSpPr/>
           <p:nvPr/>
         </p:nvSpPr>
         <p:spPr>
           <a:xfrm>
-            <a:off x="8960891" y="4114800"/>
-            <a:ext cx="2590723" cy="2286000"/>
+            <a:off x="8960891" y="4160520"/>
+            <a:ext cx="2590723" cy="2194560"/>
           </a:xfrm>
           <a:prstGeom prst="roundRect">
             <a:avLst>
@@ -5596,12 +6078,10 @@
             </a:avLst>
           </a:prstGeom>
           <a:solidFill>
-            <a:srgbClr val="EDDED4"/>
+            <a:srgbClr val="F6E2D5"/>
           </a:solidFill>
           <a:ln w="19050">
-            <a:solidFill>
-              <a:srgbClr val="765037"/>
-            </a:solidFill>
+            <a:noFill/>
             <a:prstDash val="dash"/>
           </a:ln>
         </p:spPr>
@@ -5619,7 +6099,7 @@
             <a:r>
               <a:rPr sz="1200" b="0" i="0">
                 <a:solidFill>
-                  <a:srgbClr val="37261A"/>
+                  <a:srgbClr val="8E8780"/>
                 </a:solidFill>
               </a:rPr>
               <a:t>사진 8</a:t>
@@ -5638,6 +6118,14 @@
 <file path=ppt/slides/slide6.xml><?xml version="1.0" encoding="utf-8"?>
 <p:sld xmlns:a="http://schemas.openxmlformats.org/drawingml/2006/main" xmlns:p="http://schemas.openxmlformats.org/presentationml/2006/main" xmlns:r="http://schemas.openxmlformats.org/officeDocument/2006/relationships">
   <p:cSld>
+    <p:bg>
+      <p:bgPr>
+        <a:solidFill>
+          <a:srgbClr val="FBF2EC"/>
+        </a:solidFill>
+        <a:effectLst/>
+      </p:bgPr>
+    </p:bg>
     <p:spTree>
       <p:nvGrpSpPr>
         <p:cNvPr id="1" name=""/>
@@ -5645,30 +6133,119 @@
         <p:nvPr/>
       </p:nvGrpSpPr>
       <p:grpSpPr/>
-      <p:pic>
-        <p:nvPicPr>
-          <p:cNvPr id="3" name="표지 그림" descr="birthday-32.jpg"/>
-          <p:cNvPicPr>
-            <a:picLocks noChangeAspect="1"/>
-          </p:cNvPicPr>
+      <p:sp>
+        <p:nvSpPr>
+          <p:cNvPr id="3" name="사진 자리"/>
+          <p:cNvSpPr/>
           <p:nvPr/>
-        </p:nvPicPr>
-        <p:blipFill>
-          <a:blip r:embed="rId2"/>
-          <a:stretch>
-            <a:fillRect/>
-          </a:stretch>
-        </p:blipFill>
-        <p:spPr>
-          <a:xfrm>
-            <a:off x="0" y="0"/>
-            <a:ext cx="12191695" cy="6858000"/>
+        </p:nvSpPr>
+        <p:spPr>
+          <a:xfrm>
+            <a:off x="7558851" y="685800"/>
+            <a:ext cx="3169840" cy="5486400"/>
+          </a:xfrm>
+          <a:prstGeom prst="round2SameRect">
+            <a:avLst>
+              <a:gd name="adj1" fmla="val 50000"/>
+              <a:gd name="adj2" fmla="val 0"/>
+            </a:avLst>
+          </a:prstGeom>
+          <a:solidFill>
+            <a:srgbClr val="EBC6AD"/>
+          </a:solidFill>
+          <a:ln>
+            <a:noFill/>
+          </a:ln>
+        </p:spPr>
+        <p:txBody>
+          <a:bodyPr rtlCol="0" anchor="ctr" wrap="square" lIns="54864" rIns="54864" tIns="27432" bIns="27432">
+            <a:noAutofit/>
+          </a:bodyPr>
+          <a:lstStyle/>
+          <a:p>
+            <a:pPr algn="ctr">
+              <a:lnSpc>
+                <a:spcPct val="100000"/>
+              </a:lnSpc>
+            </a:pPr>
+            <a:r>
+              <a:rPr sz="1400" b="0" i="0">
+                <a:solidFill>
+                  <a:srgbClr val="493527"/>
+                </a:solidFill>
+              </a:rPr>
+              <a:t>사진을 넣어 주세요</a:t>
+            </a:r>
+          </a:p>
+        </p:txBody>
+      </p:sp>
+      <p:sp>
+        <p:nvSpPr>
+          <p:cNvPr id="4" name="장식"/>
+          <p:cNvSpPr/>
+          <p:nvPr/>
+        </p:nvSpPr>
+        <p:spPr>
+          <a:xfrm>
+            <a:off x="6827349" y="4251960"/>
+            <a:ext cx="1005840" cy="1005840"/>
+          </a:xfrm>
+          <a:prstGeom prst="ellipse">
+            <a:avLst/>
+          </a:prstGeom>
+          <a:solidFill>
+            <a:srgbClr val="EBC6AD"/>
+          </a:solidFill>
+          <a:ln>
+            <a:noFill/>
+          </a:ln>
+        </p:spPr>
+        <p:txBody>
+          <a:bodyPr rtlCol="0" anchor="ctr"/>
+          <a:lstStyle/>
+          <a:p>
+            <a:pPr algn="ctr"/>
+          </a:p>
+        </p:txBody>
+      </p:sp>
+      <p:sp>
+        <p:nvSpPr>
+          <p:cNvPr id="5" name="라벨"/>
+          <p:cNvSpPr txBox="1"/>
+          <p:nvPr/>
+        </p:nvSpPr>
+        <p:spPr>
+          <a:xfrm>
+            <a:off x="822960" y="2148840"/>
+            <a:ext cx="5608179" cy="274320"/>
           </a:xfrm>
           <a:prstGeom prst="rect">
             <a:avLst/>
           </a:prstGeom>
-        </p:spPr>
-      </p:pic>
+          <a:noFill/>
+        </p:spPr>
+        <p:txBody>
+          <a:bodyPr wrap="square" lIns="54864" rIns="54864" tIns="27432" bIns="27432" anchor="t">
+            <a:noAutofit/>
+          </a:bodyPr>
+          <a:lstStyle/>
+          <a:p>
+            <a:pPr algn="l">
+              <a:lnSpc>
+                <a:spcPct val="115000"/>
+              </a:lnSpc>
+            </a:pPr>
+            <a:r>
+              <a:rPr sz="1000" b="1" i="0" spc="250">
+                <a:solidFill>
+                  <a:srgbClr val="26231F"/>
+                </a:solidFill>
+              </a:rPr>
+              <a:t>FIRST BIRTHDAY</a:t>
+            </a:r>
+          </a:p>
+        </p:txBody>
+      </p:sp>
       <p:sp>
         <p:nvSpPr>
           <p:cNvPr id="2" name="Title 1"/>
@@ -5681,8 +6258,8 @@
         </p:nvSpPr>
         <p:spPr>
           <a:xfrm>
-            <a:off x="853418" y="2057400"/>
-            <a:ext cx="6095847" cy="1554480"/>
+            <a:off x="822960" y="2606040"/>
+            <a:ext cx="5608179" cy="1188720"/>
           </a:xfrm>
         </p:spPr>
         <p:txBody>
@@ -5699,7 +6276,7 @@
             <a:r>
               <a:rPr sz="3400" b="1" i="0">
                 <a:solidFill>
-                  <a:srgbClr val="37261A"/>
+                  <a:srgbClr val="26231F"/>
                 </a:solidFill>
               </a:rPr>
               <a:t>와 주셔서 고맙습니다</a:t>
@@ -5709,14 +6286,14 @@
       </p:sp>
       <p:sp>
         <p:nvSpPr>
-          <p:cNvPr id="4" name="한 줄 문구"/>
+          <p:cNvPr id="6" name="한 줄 문구"/>
           <p:cNvSpPr txBox="1"/>
           <p:nvPr/>
         </p:nvSpPr>
         <p:spPr>
           <a:xfrm>
-            <a:off x="853418" y="3749039"/>
-            <a:ext cx="6095847" cy="822960"/>
+            <a:off x="822960" y="3886200"/>
+            <a:ext cx="5608179" cy="822960"/>
           </a:xfrm>
           <a:prstGeom prst="rect">
             <a:avLst/>
@@ -5735,9 +6312,9 @@
               </a:lnSpc>
             </a:pPr>
             <a:r>
-              <a:rPr sz="1700" b="0" i="1">
+              <a:rPr sz="1700" b="0" i="0">
                 <a:solidFill>
-                  <a:srgbClr val="37261A"/>
+                  <a:srgbClr val="26231F"/>
                 </a:solidFill>
               </a:rPr>
               <a:t>아이가 한 살이 되었습니다</a:t>
@@ -5747,14 +6324,14 @@
       </p:sp>
       <p:sp>
         <p:nvSpPr>
-          <p:cNvPr id="5" name="안내 문구"/>
+          <p:cNvPr id="7" name="안내 문구"/>
           <p:cNvSpPr txBox="1"/>
           <p:nvPr/>
         </p:nvSpPr>
         <p:spPr>
           <a:xfrm>
-            <a:off x="853418" y="4617720"/>
-            <a:ext cx="6095847" cy="914400"/>
+            <a:off x="822960" y="4754880"/>
+            <a:ext cx="5608179" cy="914400"/>
           </a:xfrm>
           <a:prstGeom prst="rect">
             <a:avLst/>
@@ -5775,7 +6352,7 @@
             <a:r>
               <a:rPr sz="1400" b="0" i="0">
                 <a:solidFill>
-                  <a:srgbClr val="666666"/>
+                  <a:srgbClr val="26231F"/>
                 </a:solidFill>
               </a:rPr>
               <a:t>아기 이름 · 부모 이름</a:t>
@@ -5802,34 +6379,34 @@
         <a:sysClr val="window" lastClr="FFFFFF"/>
       </a:lt1>
       <a:dk2>
-        <a:srgbClr val="37261A"/>
+        <a:srgbClr val="493527"/>
       </a:dk2>
       <a:lt2>
-        <a:srgbClr val="F8F4F1"/>
+        <a:srgbClr val="FBF2EC"/>
       </a:lt2>
       <a:accent1>
-        <a:srgbClr val="765037"/>
+        <a:srgbClr val="D89F79"/>
       </a:accent1>
       <a:accent2>
-        <a:srgbClr val="418B83"/>
+        <a:srgbClr val="E1D798"/>
       </a:accent2>
       <a:accent3>
-        <a:srgbClr val="37261A"/>
+        <a:srgbClr val="493527"/>
       </a:accent3>
       <a:accent4>
-        <a:srgbClr val="EDDED4"/>
+        <a:srgbClr val="F6E2D5"/>
       </a:accent4>
       <a:accent5>
-        <a:srgbClr val="5C6E5D"/>
+        <a:srgbClr val="DCBB88"/>
       </a:accent5>
       <a:accent6>
-        <a:srgbClr val="877D76"/>
+        <a:srgbClr val="92867D"/>
       </a:accent6>
       <a:hlink>
-        <a:srgbClr val="765037"/>
+        <a:srgbClr val="D89F79"/>
       </a:hlink>
       <a:folHlink>
-        <a:srgbClr val="37261A"/>
+        <a:srgbClr val="493527"/>
       </a:folHlink>
     </a:clrScheme>
     <a:fontScheme name="Office">
